--- a/06.Azure-Functions.pptx
+++ b/06.Azure-Functions.pptx
@@ -780,7 +780,7 @@
           <a:bodyPr/>
           <a:lstStyle/>
           <a:p>
-            <a:endParaRPr/>
+            <a:endParaRPr dirty="0"/>
           </a:p>
         </p:txBody>
       </p:sp>
@@ -974,7 +974,7 @@
           <a:bodyPr/>
           <a:lstStyle/>
           <a:p>
-            <a:endParaRPr lang="es-CO"/>
+            <a:endParaRPr lang="es-CO" dirty="0"/>
           </a:p>
         </p:txBody>
       </p:sp>
@@ -1065,7 +1065,7 @@
           <a:bodyPr/>
           <a:lstStyle/>
           <a:p>
-            <a:endParaRPr lang="es-CO"/>
+            <a:endParaRPr lang="es-CO" dirty="0"/>
           </a:p>
         </p:txBody>
       </p:sp>
@@ -1156,7 +1156,7 @@
           <a:bodyPr/>
           <a:lstStyle/>
           <a:p>
-            <a:endParaRPr lang="es-CO"/>
+            <a:endParaRPr lang="es-CO" dirty="0"/>
           </a:p>
         </p:txBody>
       </p:sp>
@@ -1247,7 +1247,7 @@
           <a:bodyPr/>
           <a:lstStyle/>
           <a:p>
-            <a:endParaRPr lang="es-CO"/>
+            <a:endParaRPr lang="es-CO" dirty="0"/>
           </a:p>
         </p:txBody>
       </p:sp>
@@ -1338,7 +1338,7 @@
           <a:bodyPr/>
           <a:lstStyle/>
           <a:p>
-            <a:endParaRPr lang="es-CO"/>
+            <a:endParaRPr lang="es-CO" dirty="0"/>
           </a:p>
         </p:txBody>
       </p:sp>
@@ -1429,7 +1429,7 @@
           <a:bodyPr/>
           <a:lstStyle/>
           <a:p>
-            <a:endParaRPr lang="es-CO"/>
+            <a:endParaRPr lang="es-CO" dirty="0"/>
           </a:p>
         </p:txBody>
       </p:sp>
@@ -1520,7 +1520,7 @@
           <a:bodyPr/>
           <a:lstStyle/>
           <a:p>
-            <a:endParaRPr lang="es-CO"/>
+            <a:endParaRPr lang="es-CO" dirty="0"/>
           </a:p>
         </p:txBody>
       </p:sp>
@@ -1611,7 +1611,7 @@
           <a:bodyPr/>
           <a:lstStyle/>
           <a:p>
-            <a:endParaRPr lang="es-CO"/>
+            <a:endParaRPr lang="es-CO" dirty="0"/>
           </a:p>
         </p:txBody>
       </p:sp>
@@ -1702,7 +1702,7 @@
           <a:bodyPr/>
           <a:lstStyle/>
           <a:p>
-            <a:endParaRPr lang="es-CO"/>
+            <a:endParaRPr lang="es-CO" dirty="0"/>
           </a:p>
         </p:txBody>
       </p:sp>
@@ -1793,7 +1793,7 @@
           <a:bodyPr/>
           <a:lstStyle/>
           <a:p>
-            <a:endParaRPr lang="es-CO"/>
+            <a:endParaRPr lang="es-CO" dirty="0"/>
           </a:p>
         </p:txBody>
       </p:sp>
@@ -1884,7 +1884,7 @@
           <a:bodyPr/>
           <a:lstStyle/>
           <a:p>
-            <a:endParaRPr lang="es-CO"/>
+            <a:endParaRPr lang="es-CO" dirty="0"/>
           </a:p>
         </p:txBody>
       </p:sp>
@@ -1975,7 +1975,7 @@
           <a:bodyPr/>
           <a:lstStyle/>
           <a:p>
-            <a:endParaRPr lang="es-CO"/>
+            <a:endParaRPr lang="es-CO" dirty="0"/>
           </a:p>
         </p:txBody>
       </p:sp>
@@ -2066,7 +2066,7 @@
           <a:bodyPr/>
           <a:lstStyle/>
           <a:p>
-            <a:endParaRPr lang="es-CO"/>
+            <a:endParaRPr lang="es-CO" dirty="0"/>
           </a:p>
         </p:txBody>
       </p:sp>
@@ -2293,7 +2293,7 @@
             <a:fld id="{86CB4B4D-7CA3-9044-876B-883B54F8677D}" type="slidenum">
               <a:t>‹#›</a:t>
             </a:fld>
-            <a:endParaRPr/>
+            <a:endParaRPr dirty="0"/>
           </a:p>
         </p:txBody>
       </p:sp>
@@ -2348,7 +2348,7 @@
           </a:bodyPr>
           <a:lstStyle/>
           <a:p>
-            <a:endParaRPr/>
+            <a:endParaRPr dirty="0"/>
           </a:p>
         </p:txBody>
       </p:sp>
@@ -2377,7 +2377,7 @@
           </a:bodyPr>
           <a:lstStyle/>
           <a:p>
-            <a:endParaRPr/>
+            <a:endParaRPr dirty="0"/>
           </a:p>
         </p:txBody>
       </p:sp>
@@ -2406,7 +2406,7 @@
           </a:bodyPr>
           <a:lstStyle/>
           <a:p>
-            <a:endParaRPr/>
+            <a:endParaRPr dirty="0"/>
           </a:p>
         </p:txBody>
       </p:sp>
@@ -2432,7 +2432,7 @@
             <a:fld id="{86CB4B4D-7CA3-9044-876B-883B54F8677D}" type="slidenum">
               <a:t>‹#›</a:t>
             </a:fld>
-            <a:endParaRPr/>
+            <a:endParaRPr dirty="0"/>
           </a:p>
         </p:txBody>
       </p:sp>
@@ -2487,7 +2487,7 @@
           </a:bodyPr>
           <a:lstStyle/>
           <a:p>
-            <a:endParaRPr/>
+            <a:endParaRPr dirty="0"/>
           </a:p>
         </p:txBody>
       </p:sp>
@@ -2525,7 +2525,7 @@
             <a:fld id="{86CB4B4D-7CA3-9044-876B-883B54F8677D}" type="slidenum">
               <a:t>‹#›</a:t>
             </a:fld>
-            <a:endParaRPr/>
+            <a:endParaRPr dirty="0"/>
           </a:p>
         </p:txBody>
       </p:sp>
@@ -2577,7 +2577,7 @@
             <a:fld id="{86CB4B4D-7CA3-9044-876B-883B54F8677D}" type="slidenum">
               <a:t>‹#›</a:t>
             </a:fld>
-            <a:endParaRPr/>
+            <a:endParaRPr dirty="0"/>
           </a:p>
         </p:txBody>
       </p:sp>
@@ -2832,7 +2832,7 @@
             <a:fld id="{86CB4B4D-7CA3-9044-876B-883B54F8677D}" type="slidenum">
               <a:t>‹#›</a:t>
             </a:fld>
-            <a:endParaRPr/>
+            <a:endParaRPr dirty="0"/>
           </a:p>
         </p:txBody>
       </p:sp>
@@ -2962,7 +2962,7 @@
             <a:fld id="{86CB4B4D-7CA3-9044-876B-883B54F8677D}" type="slidenum">
               <a:t>‹#›</a:t>
             </a:fld>
-            <a:endParaRPr/>
+            <a:endParaRPr dirty="0"/>
           </a:p>
         </p:txBody>
       </p:sp>
@@ -3121,7 +3121,7 @@
             <a:fld id="{86CB4B4D-7CA3-9044-876B-883B54F8677D}" type="slidenum">
               <a:t>‹#›</a:t>
             </a:fld>
-            <a:endParaRPr/>
+            <a:endParaRPr dirty="0"/>
           </a:p>
         </p:txBody>
       </p:sp>
@@ -3214,7 +3214,7 @@
             <a:fld id="{86CB4B4D-7CA3-9044-876B-883B54F8677D}" type="slidenum">
               <a:t>‹#›</a:t>
             </a:fld>
-            <a:endParaRPr/>
+            <a:endParaRPr dirty="0"/>
           </a:p>
         </p:txBody>
       </p:sp>
@@ -3269,7 +3269,7 @@
           </a:bodyPr>
           <a:lstStyle/>
           <a:p>
-            <a:endParaRPr/>
+            <a:endParaRPr dirty="0"/>
           </a:p>
         </p:txBody>
       </p:sp>
@@ -3446,7 +3446,7 @@
             <a:fld id="{86CB4B4D-7CA3-9044-876B-883B54F8677D}" type="slidenum">
               <a:t>‹#›</a:t>
             </a:fld>
-            <a:endParaRPr/>
+            <a:endParaRPr dirty="0"/>
           </a:p>
         </p:txBody>
       </p:sp>
@@ -3536,7 +3536,7 @@
             <a:fld id="{86CB4B4D-7CA3-9044-876B-883B54F8677D}" type="slidenum">
               <a:t>‹#›</a:t>
             </a:fld>
-            <a:endParaRPr/>
+            <a:endParaRPr dirty="0"/>
           </a:p>
         </p:txBody>
       </p:sp>
@@ -3748,7 +3748,7 @@
             <a:fld id="{86CB4B4D-7CA3-9044-876B-883B54F8677D}" type="slidenum">
               <a:t>‹#›</a:t>
             </a:fld>
-            <a:endParaRPr/>
+            <a:endParaRPr dirty="0"/>
           </a:p>
         </p:txBody>
       </p:sp>
@@ -3926,7 +3926,7 @@
             <a:fld id="{86CB4B4D-7CA3-9044-876B-883B54F8677D}" type="slidenum">
               <a:t>‹#›</a:t>
             </a:fld>
-            <a:endParaRPr/>
+            <a:endParaRPr dirty="0"/>
           </a:p>
         </p:txBody>
       </p:sp>
@@ -4112,7 +4112,7 @@
             <a:fld id="{86CB4B4D-7CA3-9044-876B-883B54F8677D}" type="slidenum">
               <a:t>‹#›</a:t>
             </a:fld>
-            <a:endParaRPr/>
+            <a:endParaRPr dirty="0"/>
           </a:p>
         </p:txBody>
       </p:sp>
@@ -4316,7 +4316,7 @@
             <a:fld id="{86CB4B4D-7CA3-9044-876B-883B54F8677D}" type="slidenum">
               <a:t>‹#›</a:t>
             </a:fld>
-            <a:endParaRPr/>
+            <a:endParaRPr dirty="0"/>
           </a:p>
         </p:txBody>
       </p:sp>
@@ -4377,7 +4377,7 @@
           </a:ln>
           <a:extLst>
             <a:ext uri="{C572A759-6A51-4108-AA02-DFA0A04FC94B}">
-              <ma14:wrappingTextBoxFlag xmlns:m="http://schemas.openxmlformats.org/officeDocument/2006/math" xmlns:a14="http://schemas.microsoft.com/office/drawing/2010/main" xmlns:ma14="http://schemas.microsoft.com/office/mac/drawingml/2011/main" xmlns="" val="1"/>
+              <ma14:wrappingTextBoxFlag xmlns="" xmlns:m="http://schemas.openxmlformats.org/officeDocument/2006/math" xmlns:a14="http://schemas.microsoft.com/office/drawing/2010/main" xmlns:ma14="http://schemas.microsoft.com/office/mac/drawingml/2011/main" val="1"/>
             </a:ext>
           </a:extLst>
         </p:spPr>
@@ -4432,7 +4432,7 @@
           </a:ln>
           <a:extLst>
             <a:ext uri="{C572A759-6A51-4108-AA02-DFA0A04FC94B}">
-              <ma14:wrappingTextBoxFlag xmlns:m="http://schemas.openxmlformats.org/officeDocument/2006/math" xmlns:a14="http://schemas.microsoft.com/office/drawing/2010/main" xmlns:ma14="http://schemas.microsoft.com/office/mac/drawingml/2011/main" xmlns="" val="1"/>
+              <ma14:wrappingTextBoxFlag xmlns="" xmlns:m="http://schemas.openxmlformats.org/officeDocument/2006/math" xmlns:a14="http://schemas.microsoft.com/office/drawing/2010/main" xmlns:ma14="http://schemas.microsoft.com/office/mac/drawingml/2011/main" val="1"/>
             </a:ext>
           </a:extLst>
         </p:spPr>
@@ -4487,7 +4487,7 @@
             <a:fld id="{86CB4B4D-7CA3-9044-876B-883B54F8677D}" type="slidenum">
               <a:t>‹#›</a:t>
             </a:fld>
-            <a:endParaRPr/>
+            <a:endParaRPr dirty="0"/>
           </a:p>
         </p:txBody>
       </p:sp>
@@ -5272,7 +5272,7 @@
           </a:ln>
           <a:extLst>
             <a:ext uri="{C572A759-6A51-4108-AA02-DFA0A04FC94B}">
-              <ma14:wrappingTextBoxFlag xmlns:m="http://schemas.openxmlformats.org/officeDocument/2006/math" xmlns:a14="http://schemas.microsoft.com/office/drawing/2010/main" xmlns:ma14="http://schemas.microsoft.com/office/mac/drawingml/2011/main" xmlns="" val="1"/>
+              <ma14:wrappingTextBoxFlag xmlns="" xmlns:m="http://schemas.openxmlformats.org/officeDocument/2006/math" xmlns:a14="http://schemas.microsoft.com/office/drawing/2010/main" xmlns:ma14="http://schemas.microsoft.com/office/mac/drawingml/2011/main" val="1"/>
             </a:ext>
           </a:extLst>
         </p:spPr>
@@ -5292,12 +5292,12 @@
           <a:p>
             <a:pPr algn="ctr"/>
             <a:r>
-              <a:rPr lang="pt-BR" sz="4800">
+              <a:rPr lang="pt-BR" sz="4800" dirty="0">
                 <a:latin typeface="Helvetica Light"/>
               </a:rPr>
               <a:t>Azure Functions</a:t>
             </a:r>
-            <a:endParaRPr sz="4800">
+            <a:endParaRPr sz="4800" dirty="0">
               <a:latin typeface="Helvetica Light"/>
             </a:endParaRPr>
           </a:p>
@@ -5350,12 +5350,12 @@
           <a:lstStyle/>
           <a:p>
             <a:r>
-              <a:rPr lang="pt-BR" sz="4800">
+              <a:rPr lang="pt-BR" sz="4800" dirty="0">
                 <a:latin typeface="Helvetica Light"/>
               </a:rPr>
               <a:t>Serverless</a:t>
             </a:r>
-            <a:endParaRPr lang="es-CO"/>
+            <a:endParaRPr lang="es-CO" dirty="0"/>
           </a:p>
         </p:txBody>
       </p:sp>
@@ -5518,7 +5518,7 @@
           </a:lstStyle>
           <a:p>
             <a:r>
-              <a:rPr lang="es-CO" b="0"/>
+              <a:rPr lang="es-CO" b="0" dirty="0"/>
               <a:t>¿Cómo funciona la arquitectura sin servidor?</a:t>
             </a:r>
           </a:p>
@@ -5549,7 +5549,7 @@
           </a:ln>
           <a:extLst>
             <a:ext uri="{C572A759-6A51-4108-AA02-DFA0A04FC94B}">
-              <ma14:wrappingTextBoxFlag xmlns:m="http://schemas.openxmlformats.org/officeDocument/2006/math" xmlns:a14="http://schemas.microsoft.com/office/drawing/2010/main" xmlns:ma14="http://schemas.microsoft.com/office/mac/drawingml/2011/main" xmlns="" val="1"/>
+              <ma14:wrappingTextBoxFlag xmlns="" xmlns:m="http://schemas.openxmlformats.org/officeDocument/2006/math" xmlns:a14="http://schemas.microsoft.com/office/drawing/2010/main" xmlns:ma14="http://schemas.microsoft.com/office/mac/drawingml/2011/main" val="1"/>
             </a:ext>
           </a:extLst>
         </p:spPr>
@@ -5561,62 +5561,62 @@
           <a:p>
             <a:pPr algn="just"/>
             <a:r>
-              <a:rPr lang="es-CO" sz="2800" b="1"/>
+              <a:rPr lang="es-CO" sz="2800" b="1" dirty="0"/>
               <a:t>Funciones</a:t>
             </a:r>
           </a:p>
           <a:p>
             <a:pPr algn="just"/>
-            <a:endParaRPr lang="es-CO" sz="2800"/>
+            <a:endParaRPr lang="es-CO" sz="2800" dirty="0"/>
           </a:p>
           <a:p>
             <a:pPr algn="just"/>
             <a:r>
-              <a:rPr lang="es-CO" sz="2800"/>
+              <a:rPr lang="es-CO" sz="2800" dirty="0"/>
               <a:t>Las funciones son unidades de código pequeñas y discretas que realizan una sola tarea. Una función requiere recursos informáticos como la CPU y la memoria para ejecutarse. El proveedor de servicios en la nube asigna estos recursos solo cuando es necesario. Crea un entorno temporal para que se ejecute la función sin servidor.</a:t>
             </a:r>
           </a:p>
           <a:p>
             <a:pPr algn="just"/>
-            <a:endParaRPr lang="es-CO" sz="2800"/>
+            <a:endParaRPr lang="es-CO" sz="2800" dirty="0"/>
           </a:p>
           <a:p>
             <a:pPr algn="just"/>
             <a:r>
-              <a:rPr lang="es-CO" sz="2800"/>
+              <a:rPr lang="es-CO" sz="2800" dirty="0"/>
               <a:t>Ciertos eventos pueden activar la unidad de código o hacer que se ejecute. Por ejemplo, un evento podría ejecutarse si un usuario selecciona un botón en una aplicación. La solicitud activaría una función que lee la base de datos y devuelve la información relevante al usuario.</a:t>
             </a:r>
           </a:p>
           <a:p>
             <a:pPr algn="just"/>
-            <a:endParaRPr lang="es-CO" sz="2800"/>
+            <a:endParaRPr lang="es-CO" sz="2800" dirty="0"/>
           </a:p>
           <a:p>
             <a:pPr algn="just"/>
             <a:r>
-              <a:rPr lang="es-CO" sz="2800" b="1"/>
+              <a:rPr lang="es-CO" sz="2800" b="1" dirty="0"/>
               <a:t>Escalado de solicitudes</a:t>
             </a:r>
           </a:p>
           <a:p>
             <a:pPr algn="just"/>
-            <a:endParaRPr lang="es-CO" sz="2800"/>
+            <a:endParaRPr lang="es-CO" sz="2800" dirty="0"/>
           </a:p>
           <a:p>
             <a:pPr algn="just"/>
             <a:r>
-              <a:rPr lang="es-CO" sz="2800"/>
+              <a:rPr lang="es-CO" sz="2800" dirty="0"/>
               <a:t>Cuantas más solicitudes reciba una función, más recursos necesitará para ejecutarse. La plataforma sin servidor monitorea la carga y sigue asignando los recursos de la nube a una escala casi infinita. De este modo, una sola función sin servidor puede gestionar una o un millón de solicitudes sin cambios en el código.</a:t>
             </a:r>
           </a:p>
           <a:p>
             <a:pPr algn="just"/>
-            <a:endParaRPr lang="es-CO" sz="2800"/>
+            <a:endParaRPr lang="es-CO" sz="2800" dirty="0"/>
           </a:p>
           <a:p>
             <a:pPr algn="just"/>
             <a:r>
-              <a:rPr lang="es-CO" sz="2800"/>
+              <a:rPr lang="es-CO" sz="2800" dirty="0"/>
               <a:t>Una vez que una función deja de recibir solicitudes, el proveedor de servicios en la nube desactiva la infraestructura asociada para ahorrar costes. Asigna recursos solo cuando es necesario. Si no se usa, el entorno puede reducirse a cero.</a:t>
             </a:r>
           </a:p>
@@ -5684,7 +5684,7 @@
           </a:ln>
           <a:extLst>
             <a:ext uri="{C572A759-6A51-4108-AA02-DFA0A04FC94B}">
-              <ma14:wrappingTextBoxFlag xmlns:m="http://schemas.openxmlformats.org/officeDocument/2006/math" xmlns:a14="http://schemas.microsoft.com/office/drawing/2010/main" xmlns:ma14="http://schemas.microsoft.com/office/mac/drawingml/2011/main" xmlns="" val="1"/>
+              <ma14:wrappingTextBoxFlag xmlns="" xmlns:m="http://schemas.openxmlformats.org/officeDocument/2006/math" xmlns:a14="http://schemas.microsoft.com/office/drawing/2010/main" xmlns:ma14="http://schemas.microsoft.com/office/mac/drawingml/2011/main" val="1"/>
             </a:ext>
           </a:extLst>
         </p:spPr>
@@ -5703,7 +5703,7 @@
           </a:lstStyle>
           <a:p>
             <a:r>
-              <a:rPr lang="es-CO" sz="3200" noProof="0">
+              <a:rPr lang="es-CO" sz="3200" noProof="0" dirty="0">
                 <a:latin typeface="Helvetica Light"/>
               </a:rPr>
               <a:t>¿Cuáles son los tipos de arquitectura sin servidor?</a:t>
@@ -5748,23 +5748,23 @@
           <a:p>
             <a:pPr algn="just"/>
             <a:r>
-              <a:rPr lang="es-CO" sz="2800"/>
+              <a:rPr lang="es-CO" sz="2800" dirty="0"/>
               <a:t>En la arquitectura sin servidor, el proveedor de servicios en la nube administra varias tareas de </a:t>
             </a:r>
             <a:r>
-              <a:rPr lang="es-CO" sz="2800" err="1"/>
+              <a:rPr lang="es-CO" sz="2800" dirty="0" err="1"/>
               <a:t>backend</a:t>
             </a:r>
             <a:r>
-              <a:rPr lang="es-CO" sz="2800"/>
+              <a:rPr lang="es-CO" sz="2800" dirty="0"/>
               <a:t> pequeñas y grandes para la aplicación. Puede implementar código personalizado; el proveedor de servicios en la nube asignará recursos de forma dinámica cada vez que se ejecute el código. La plataforma en la nube también puede proporcionar una funcionalidad de </a:t>
             </a:r>
             <a:r>
-              <a:rPr lang="es-CO" sz="2800" err="1"/>
+              <a:rPr lang="es-CO" sz="2800" dirty="0" err="1"/>
               <a:t>backend</a:t>
             </a:r>
             <a:r>
-              <a:rPr lang="es-CO" sz="2800"/>
+              <a:rPr lang="es-CO" sz="2800" dirty="0"/>
               <a:t> que puede usar directamente sin escribir código desde cero.</a:t>
             </a:r>
           </a:p>
@@ -5795,7 +5795,7 @@
           </a:ln>
           <a:extLst>
             <a:ext uri="{C572A759-6A51-4108-AA02-DFA0A04FC94B}">
-              <ma14:wrappingTextBoxFlag xmlns:m="http://schemas.openxmlformats.org/officeDocument/2006/math" xmlns:a14="http://schemas.microsoft.com/office/drawing/2010/main" xmlns:ma14="http://schemas.microsoft.com/office/mac/drawingml/2011/main" xmlns="" val="1"/>
+              <ma14:wrappingTextBoxFlag xmlns="" xmlns:m="http://schemas.openxmlformats.org/officeDocument/2006/math" xmlns:a14="http://schemas.microsoft.com/office/drawing/2010/main" xmlns:ma14="http://schemas.microsoft.com/office/mac/drawingml/2011/main" val="1"/>
             </a:ext>
           </a:extLst>
         </p:spPr>
@@ -5814,7 +5814,7 @@
           </a:lstStyle>
           <a:p>
             <a:r>
-              <a:rPr lang="es-CO" sz="3200" noProof="0">
+              <a:rPr lang="es-CO" sz="3200" noProof="0" dirty="0">
                 <a:latin typeface="Helvetica Light"/>
               </a:rPr>
               <a:t>Función como servicios (FaaS)</a:t>
@@ -5859,26 +5859,26 @@
           <a:p>
             <a:pPr algn="just"/>
             <a:r>
-              <a:rPr lang="es-CO" sz="2800"/>
+              <a:rPr lang="es-CO" sz="2800" dirty="0"/>
               <a:t>La función como servicio (FaaS) es una arquitectura sin servidor que los desarrolladores pueden usar para escribir funciones de </a:t>
             </a:r>
             <a:r>
-              <a:rPr lang="es-CO" sz="2800" err="1"/>
+              <a:rPr lang="es-CO" sz="2800" dirty="0" err="1"/>
               <a:t>backend</a:t>
             </a:r>
             <a:r>
-              <a:rPr lang="es-CO" sz="2800"/>
+              <a:rPr lang="es-CO" sz="2800" dirty="0"/>
               <a:t> personalizadas e implementar el código de la función directamente en la infraestructura de la nube. </a:t>
             </a:r>
           </a:p>
           <a:p>
             <a:pPr algn="just"/>
-            <a:endParaRPr lang="es-CO" sz="2800"/>
+            <a:endParaRPr lang="es-CO" sz="2800" dirty="0"/>
           </a:p>
           <a:p>
             <a:pPr algn="just"/>
             <a:r>
-              <a:rPr lang="es-CO" sz="2800"/>
+              <a:rPr lang="es-CO" sz="2800" dirty="0"/>
               <a:t>Cuando se llama a una función, el proveedor de servicios en la nube ejecuta la función en un servidor activo existente o activa un nuevo servidor si es necesario. Estas funciones se denominan funciones sin servidor porque su proceso de ejecución se abstrae de los desarrolladores. Los desarrolladores pueden escribir e implementar código sin preocuparse por cómo y dónde se ejecuta.</a:t>
             </a:r>
           </a:p>
@@ -5965,7 +5965,7 @@
           </a:lstStyle>
           <a:p>
             <a:r>
-              <a:rPr lang="es-CO" sz="3200" noProof="0">
+              <a:rPr lang="es-CO" sz="3200" noProof="0" dirty="0">
                 <a:latin typeface="Helvetica Light"/>
               </a:rPr>
               <a:t>¿Cuáles son los tipos de arquitectura sin servidor?</a:t>
@@ -5998,7 +5998,7 @@
           </a:ln>
           <a:extLst>
             <a:ext uri="{C572A759-6A51-4108-AA02-DFA0A04FC94B}">
-              <ma14:wrappingTextBoxFlag xmlns:m="http://schemas.openxmlformats.org/officeDocument/2006/math" xmlns:a14="http://schemas.microsoft.com/office/drawing/2010/main" xmlns:ma14="http://schemas.microsoft.com/office/mac/drawingml/2011/main" xmlns="" val="1"/>
+              <ma14:wrappingTextBoxFlag xmlns="" xmlns:m="http://schemas.openxmlformats.org/officeDocument/2006/math" xmlns:a14="http://schemas.microsoft.com/office/drawing/2010/main" xmlns:ma14="http://schemas.microsoft.com/office/mac/drawingml/2011/main" val="1"/>
             </a:ext>
           </a:extLst>
         </p:spPr>
@@ -6010,23 +6010,23 @@
           <a:p>
             <a:pPr algn="just"/>
             <a:r>
-              <a:rPr lang="es-CO" sz="2800"/>
+              <a:rPr lang="es-CO" sz="2800" dirty="0"/>
               <a:t>En la arquitectura sin servidor, el proveedor de servicios en la nube administra varias tareas de </a:t>
             </a:r>
             <a:r>
-              <a:rPr lang="es-CO" sz="2800" err="1"/>
+              <a:rPr lang="es-CO" sz="2800" dirty="0" err="1"/>
               <a:t>backend</a:t>
             </a:r>
             <a:r>
-              <a:rPr lang="es-CO" sz="2800"/>
+              <a:rPr lang="es-CO" sz="2800" dirty="0"/>
               <a:t> pequeñas y grandes para la aplicación. Puede implementar código personalizado; el proveedor de servicios en la nube asignará recursos de forma dinámica cada vez que se ejecute el código. La plataforma en la nube también puede proporcionar una funcionalidad de </a:t>
             </a:r>
             <a:r>
-              <a:rPr lang="es-CO" sz="2800" err="1"/>
+              <a:rPr lang="es-CO" sz="2800" dirty="0" err="1"/>
               <a:t>backend</a:t>
             </a:r>
             <a:r>
-              <a:rPr lang="es-CO" sz="2800"/>
+              <a:rPr lang="es-CO" sz="2800" dirty="0"/>
               <a:t> que puede usar directamente sin escribir código desde cero.</a:t>
             </a:r>
           </a:p>
@@ -6076,13 +6076,13 @@
           </a:lstStyle>
           <a:p>
             <a:r>
-              <a:rPr lang="es-CO" sz="3200" noProof="0" err="1">
+              <a:rPr lang="es-CO" sz="3200" noProof="0" dirty="0" err="1">
                 <a:latin typeface="Helvetica Light"/>
               </a:rPr>
               <a:t>Backend</a:t>
             </a:r>
             <a:r>
-              <a:rPr lang="es-CO" sz="3200" noProof="0">
+              <a:rPr lang="es-CO" sz="3200" noProof="0" dirty="0">
                 <a:latin typeface="Helvetica Light"/>
               </a:rPr>
               <a:t> como servicio (BaaS)</a:t>
@@ -6115,7 +6115,7 @@
           </a:ln>
           <a:extLst>
             <a:ext uri="{C572A759-6A51-4108-AA02-DFA0A04FC94B}">
-              <ma14:wrappingTextBoxFlag xmlns:m="http://schemas.openxmlformats.org/officeDocument/2006/math" xmlns:a14="http://schemas.microsoft.com/office/drawing/2010/main" xmlns:ma14="http://schemas.microsoft.com/office/mac/drawingml/2011/main" xmlns="" val="1"/>
+              <ma14:wrappingTextBoxFlag xmlns="" xmlns:m="http://schemas.openxmlformats.org/officeDocument/2006/math" xmlns:a14="http://schemas.microsoft.com/office/drawing/2010/main" xmlns:ma14="http://schemas.microsoft.com/office/mac/drawingml/2011/main" val="1"/>
             </a:ext>
           </a:extLst>
         </p:spPr>
@@ -6127,42 +6127,42 @@
           <a:p>
             <a:pPr algn="just"/>
             <a:r>
-              <a:rPr lang="es-CO" sz="2800"/>
+              <a:rPr lang="es-CO" sz="2800" dirty="0"/>
               <a:t>El </a:t>
             </a:r>
             <a:r>
-              <a:rPr lang="es-CO" sz="2800" err="1"/>
+              <a:rPr lang="es-CO" sz="2800" dirty="0" err="1"/>
               <a:t>backend</a:t>
             </a:r>
             <a:r>
-              <a:rPr lang="es-CO" sz="2800"/>
+              <a:rPr lang="es-CO" sz="2800" dirty="0"/>
               <a:t> como servicio (BaaS) brinda a los desarrolladores acceso a las funciones del </a:t>
             </a:r>
             <a:r>
-              <a:rPr lang="es-CO" sz="2800" err="1"/>
+              <a:rPr lang="es-CO" sz="2800" dirty="0" err="1"/>
               <a:t>backend</a:t>
             </a:r>
             <a:r>
-              <a:rPr lang="es-CO" sz="2800"/>
+              <a:rPr lang="es-CO" sz="2800" dirty="0"/>
               <a:t> mediante una API. Las API son mecanismos que permiten a dos componentes de software comunicarse entre sí mediante un conjunto de definiciones y protocolos.</a:t>
             </a:r>
           </a:p>
           <a:p>
             <a:pPr algn="just"/>
-            <a:endParaRPr lang="es-CO" sz="2800"/>
+            <a:endParaRPr lang="es-CO" sz="2800" dirty="0"/>
           </a:p>
           <a:p>
             <a:pPr algn="just"/>
             <a:r>
-              <a:rPr lang="es-CO" sz="2800"/>
+              <a:rPr lang="es-CO" sz="2800" dirty="0"/>
               <a:t>En el entorno sin servidor, los proveedores de servicios en la nube brindan acceso basado en API a bases de datos adicionales de cifrado, autenticación y acceso a la nube. También pueden proporcionar acceso a otros servicios y aplicaciones de terceros. Estas funciones sin servidor vienen </a:t>
             </a:r>
             <a:r>
-              <a:rPr lang="es-CO" sz="2800" err="1"/>
+              <a:rPr lang="es-CO" sz="2800" dirty="0" err="1"/>
               <a:t>preescritas</a:t>
             </a:r>
             <a:r>
-              <a:rPr lang="es-CO" sz="2800"/>
+              <a:rPr lang="es-CO" sz="2800" dirty="0"/>
               <a:t> y se pueden llamar directamente en el código.</a:t>
             </a:r>
           </a:p>
@@ -6322,18 +6322,18 @@
           </a:lstStyle>
           <a:p>
             <a:r>
-              <a:rPr lang="es-CO" sz="3200" noProof="0">
+              <a:rPr lang="es-CO" sz="3200" noProof="0" dirty="0">
                 <a:latin typeface="Helvetica Light"/>
               </a:rPr>
               <a:t>Azure </a:t>
             </a:r>
             <a:r>
-              <a:rPr lang="es-CO" sz="3200" noProof="0" err="1">
+              <a:rPr lang="es-CO" sz="3200" noProof="0" dirty="0" err="1">
                 <a:latin typeface="Helvetica Light"/>
               </a:rPr>
               <a:t>Functions</a:t>
             </a:r>
-            <a:endParaRPr lang="es-CO" sz="3200" u="sng" noProof="0">
+            <a:endParaRPr lang="es-CO" sz="3200" u="sng" noProof="0" dirty="0">
               <a:latin typeface="Helvetica Light"/>
             </a:endParaRPr>
           </a:p>
@@ -6364,7 +6364,7 @@
           </a:ln>
           <a:extLst>
             <a:ext uri="{C572A759-6A51-4108-AA02-DFA0A04FC94B}">
-              <ma14:wrappingTextBoxFlag xmlns:m="http://schemas.openxmlformats.org/officeDocument/2006/math" xmlns:a14="http://schemas.microsoft.com/office/drawing/2010/main" xmlns:ma14="http://schemas.microsoft.com/office/mac/drawingml/2011/main" xmlns="" val="1"/>
+              <ma14:wrappingTextBoxFlag xmlns="" xmlns:m="http://schemas.openxmlformats.org/officeDocument/2006/math" xmlns:a14="http://schemas.microsoft.com/office/drawing/2010/main" xmlns:ma14="http://schemas.microsoft.com/office/mac/drawingml/2011/main" val="1"/>
             </a:ext>
           </a:extLst>
         </p:spPr>
@@ -6376,41 +6376,41 @@
           <a:p>
             <a:pPr algn="just"/>
             <a:r>
-              <a:rPr lang="es-CO" sz="2800"/>
+              <a:rPr lang="es-CO" sz="2800" dirty="0"/>
               <a:t>Azure </a:t>
             </a:r>
             <a:r>
-              <a:rPr lang="es-CO" sz="2800" err="1"/>
+              <a:rPr lang="es-CO" sz="2800" dirty="0" err="1"/>
               <a:t>Functions</a:t>
             </a:r>
             <a:r>
-              <a:rPr lang="es-CO" sz="2800"/>
+              <a:rPr lang="es-CO" sz="2800" dirty="0"/>
               <a:t> es una opción de proceso sin servidor controlada por eventos que no necesita el mantenimiento de máquinas virtuales ni contenedores. </a:t>
             </a:r>
           </a:p>
           <a:p>
             <a:pPr algn="just"/>
-            <a:endParaRPr lang="es-CO" sz="2800"/>
+            <a:endParaRPr lang="es-CO" sz="2800" dirty="0"/>
           </a:p>
           <a:p>
             <a:pPr algn="just"/>
             <a:r>
-              <a:rPr lang="es-CO" sz="2800"/>
+              <a:rPr lang="es-CO" sz="2800" dirty="0"/>
               <a:t>Si compila una aplicación mediante máquinas virtuales o contenedores, esos recursos deben "ejecutarse" para que la aplicación funcione. Con Azure </a:t>
             </a:r>
             <a:r>
-              <a:rPr lang="es-CO" sz="2800" err="1"/>
+              <a:rPr lang="es-CO" sz="2800" dirty="0" err="1"/>
               <a:t>Functions</a:t>
             </a:r>
             <a:r>
-              <a:rPr lang="es-CO" sz="2800"/>
+              <a:rPr lang="es-CO" sz="2800" dirty="0"/>
               <a:t>, un evento activa la función, lo que reduce la necesidad de mantener los recursos aprovisionados cuando no hay ningún evento.</a:t>
             </a:r>
           </a:p>
           <a:p>
             <a:pPr algn="just"/>
             <a:r>
-              <a:rPr lang="es-CO" sz="2800"/>
+              <a:rPr lang="es-CO" sz="2800" dirty="0"/>
               <a:t>  </a:t>
             </a:r>
           </a:p>
@@ -6508,7 +6508,7 @@
           </a:ln>
           <a:extLst>
             <a:ext uri="{C572A759-6A51-4108-AA02-DFA0A04FC94B}">
-              <ma14:wrappingTextBoxFlag xmlns:m="http://schemas.openxmlformats.org/officeDocument/2006/math" xmlns:a14="http://schemas.microsoft.com/office/drawing/2010/main" xmlns:ma14="http://schemas.microsoft.com/office/mac/drawingml/2011/main" xmlns="" val="1"/>
+              <ma14:wrappingTextBoxFlag xmlns="" xmlns:m="http://schemas.openxmlformats.org/officeDocument/2006/math" xmlns:a14="http://schemas.microsoft.com/office/drawing/2010/main" xmlns:ma14="http://schemas.microsoft.com/office/mac/drawingml/2011/main" val="1"/>
             </a:ext>
           </a:extLst>
         </p:spPr>
@@ -6527,18 +6527,18 @@
           </a:lstStyle>
           <a:p>
             <a:r>
-              <a:rPr lang="es-CO" sz="3200" noProof="0">
+              <a:rPr lang="es-CO" sz="3200" noProof="0" dirty="0">
                 <a:latin typeface="Helvetica Light"/>
               </a:rPr>
               <a:t>Azure </a:t>
             </a:r>
             <a:r>
-              <a:rPr lang="es-CO" sz="3200" noProof="0" err="1">
+              <a:rPr lang="es-CO" sz="3200" noProof="0" dirty="0" err="1">
                 <a:latin typeface="Helvetica Light"/>
               </a:rPr>
               <a:t>Functions</a:t>
             </a:r>
-            <a:endParaRPr lang="es-CO" sz="3200" u="sng" noProof="0">
+            <a:endParaRPr lang="es-CO" sz="3200" u="sng" noProof="0" dirty="0">
               <a:latin typeface="Helvetica Light"/>
             </a:endParaRPr>
           </a:p>
@@ -6581,49 +6581,49 @@
           <a:p>
             <a:pPr algn="just"/>
             <a:r>
-              <a:rPr lang="es-CO" sz="2800"/>
+              <a:rPr lang="es-CO" sz="2800" dirty="0"/>
               <a:t>El uso de Azure </a:t>
             </a:r>
             <a:r>
-              <a:rPr lang="es-CO" sz="2800" err="1"/>
+              <a:rPr lang="es-CO" sz="2800" dirty="0" err="1"/>
               <a:t>Functions</a:t>
             </a:r>
             <a:r>
-              <a:rPr lang="es-CO" sz="2800"/>
+              <a:rPr lang="es-CO" sz="2800" dirty="0"/>
               <a:t> es idóneo si solo nos interesa el código que ejecuta el servicio y no la infraestructura o la plataforma subyacente. Las funciones se usan normalmente cuando se debe realizar un trabajo en respuesta a un evento (a menudo a través de una solicitud REST), un temporizador o un mensaje de otro servicio de Azure, y cuando ese trabajo puede completarse rápidamente, en segundos o en menos tiempo.</a:t>
             </a:r>
           </a:p>
           <a:p>
             <a:pPr algn="just"/>
-            <a:endParaRPr lang="es-CO" sz="2800"/>
+            <a:endParaRPr lang="es-CO" sz="2800" dirty="0"/>
           </a:p>
           <a:p>
             <a:pPr algn="just"/>
             <a:r>
-              <a:rPr lang="es-CO" sz="2800" err="1"/>
+              <a:rPr lang="es-CO" sz="2800" dirty="0" err="1"/>
               <a:t>Functions</a:t>
             </a:r>
             <a:r>
-              <a:rPr lang="es-CO" sz="2800"/>
+              <a:rPr lang="es-CO" sz="2800" dirty="0"/>
               <a:t> se escala automáticamente según la demanda, por lo que es una opción correcta cuando la demanda es variable.</a:t>
             </a:r>
           </a:p>
           <a:p>
             <a:pPr algn="just"/>
-            <a:endParaRPr lang="es-CO" sz="2800"/>
+            <a:endParaRPr lang="es-CO" sz="2800" dirty="0"/>
           </a:p>
           <a:p>
             <a:pPr algn="just"/>
             <a:r>
-              <a:rPr lang="es-CO" sz="2800"/>
+              <a:rPr lang="es-CO" sz="2800" dirty="0"/>
               <a:t>Azure </a:t>
             </a:r>
             <a:r>
-              <a:rPr lang="es-CO" sz="2800" err="1"/>
+              <a:rPr lang="es-CO" sz="2800" dirty="0" err="1"/>
               <a:t>Functions</a:t>
             </a:r>
             <a:r>
-              <a:rPr lang="es-CO" sz="2800"/>
+              <a:rPr lang="es-CO" sz="2800" dirty="0"/>
               <a:t> ejecuta el código cuando se desencadena y desasigna automáticamente los recursos cuando finaliza la función. En este modelo, Azure solo cobra por el tiempo de CPU usado mientras se ejecuta la función.</a:t>
             </a:r>
           </a:p>
@@ -6777,18 +6777,18 @@
           </a:lstStyle>
           <a:p>
             <a:r>
-              <a:rPr lang="es-CO" sz="3200" noProof="0">
+              <a:rPr lang="es-CO" sz="3200" noProof="0" dirty="0">
                 <a:latin typeface="Helvetica Light"/>
               </a:rPr>
               <a:t>Azure </a:t>
             </a:r>
             <a:r>
-              <a:rPr lang="es-CO" sz="3200" noProof="0" err="1">
+              <a:rPr lang="es-CO" sz="3200" noProof="0" dirty="0" err="1">
                 <a:latin typeface="Helvetica Light"/>
               </a:rPr>
               <a:t>Functions</a:t>
             </a:r>
-            <a:endParaRPr lang="es-CO" sz="3200" u="sng" noProof="0">
+            <a:endParaRPr lang="es-CO" sz="3200" u="sng" noProof="0" dirty="0">
               <a:latin typeface="Helvetica Light"/>
             </a:endParaRPr>
           </a:p>
@@ -6819,7 +6819,7 @@
           </a:ln>
           <a:extLst>
             <a:ext uri="{C572A759-6A51-4108-AA02-DFA0A04FC94B}">
-              <ma14:wrappingTextBoxFlag xmlns:m="http://schemas.openxmlformats.org/officeDocument/2006/math" xmlns:a14="http://schemas.microsoft.com/office/drawing/2010/main" xmlns:ma14="http://schemas.microsoft.com/office/mac/drawingml/2011/main" xmlns="" val="1"/>
+              <ma14:wrappingTextBoxFlag xmlns="" xmlns:m="http://schemas.openxmlformats.org/officeDocument/2006/math" xmlns:a14="http://schemas.microsoft.com/office/drawing/2010/main" xmlns:ma14="http://schemas.microsoft.com/office/mac/drawingml/2011/main" val="1"/>
             </a:ext>
           </a:extLst>
         </p:spPr>
@@ -6831,26 +6831,26 @@
           <a:p>
             <a:pPr algn="just"/>
             <a:r>
-              <a:rPr lang="es-CO" sz="2800"/>
+              <a:rPr lang="es-CO" sz="2800" dirty="0"/>
               <a:t>Las funciones pueden ser sin estado o con estado. Cuando no tienen estado (el valor predeterminado), se comportan como si se reiniciaran cada vez que respondan a un evento. Cuando son con estado (denominado Durable </a:t>
             </a:r>
             <a:r>
-              <a:rPr lang="es-CO" sz="2800" err="1"/>
+              <a:rPr lang="es-CO" sz="2800" dirty="0" err="1"/>
               <a:t>Functions</a:t>
             </a:r>
             <a:r>
-              <a:rPr lang="es-CO" sz="2800"/>
+              <a:rPr lang="es-CO" sz="2800" dirty="0"/>
               <a:t>), el entorno de ejecución pasa un contexto a través de la función para realizar el seguimiento antes de la actividad.</a:t>
             </a:r>
           </a:p>
           <a:p>
             <a:pPr algn="just"/>
-            <a:endParaRPr lang="es-CO" sz="2800"/>
+            <a:endParaRPr lang="es-CO" sz="2800" dirty="0"/>
           </a:p>
           <a:p>
             <a:pPr algn="just"/>
             <a:r>
-              <a:rPr lang="es-CO" sz="2800"/>
+              <a:rPr lang="es-CO" sz="2800" dirty="0"/>
               <a:t>Las funciones son un componente clave de la informática sin servidor. También son una plataforma de proceso general para ejecutar cualquier tipo de código. Si las necesidades de la aplicación cambian, puede implementar el proyecto en un entorno que no sea sin servidor.</a:t>
             </a:r>
           </a:p>
@@ -6918,7 +6918,7 @@
           </a:ln>
           <a:extLst>
             <a:ext uri="{C572A759-6A51-4108-AA02-DFA0A04FC94B}">
-              <ma14:wrappingTextBoxFlag xmlns:m="http://schemas.openxmlformats.org/officeDocument/2006/math" xmlns:a14="http://schemas.microsoft.com/office/drawing/2010/main" xmlns:ma14="http://schemas.microsoft.com/office/mac/drawingml/2011/main" xmlns="" val="1"/>
+              <ma14:wrappingTextBoxFlag xmlns="" xmlns:m="http://schemas.openxmlformats.org/officeDocument/2006/math" xmlns:a14="http://schemas.microsoft.com/office/drawing/2010/main" xmlns:ma14="http://schemas.microsoft.com/office/mac/drawingml/2011/main" val="1"/>
             </a:ext>
           </a:extLst>
         </p:spPr>
@@ -6937,36 +6937,36 @@
           </a:lstStyle>
           <a:p>
             <a:r>
-              <a:rPr lang="es-CO" sz="3200" noProof="0">
+              <a:rPr lang="es-CO" sz="3200" noProof="0" dirty="0">
                 <a:latin typeface="Helvetica Light"/>
               </a:rPr>
               <a:t>Azure </a:t>
             </a:r>
             <a:r>
-              <a:rPr lang="es-CO" sz="3200" noProof="0" err="1">
+              <a:rPr lang="es-CO" sz="3200" noProof="0" dirty="0" err="1">
                 <a:latin typeface="Helvetica Light"/>
               </a:rPr>
               <a:t>Functions</a:t>
             </a:r>
             <a:r>
-              <a:rPr lang="es-CO" sz="3200" noProof="0">
+              <a:rPr lang="es-CO" sz="3200" noProof="0" dirty="0">
                 <a:latin typeface="Helvetica Light"/>
               </a:rPr>
               <a:t> vs </a:t>
             </a:r>
             <a:r>
-              <a:rPr lang="es-CO" sz="3200" noProof="0" err="1">
+              <a:rPr lang="es-CO" sz="3200" noProof="0" dirty="0" err="1">
                 <a:latin typeface="Helvetica Light"/>
               </a:rPr>
               <a:t>VMs</a:t>
             </a:r>
             <a:r>
-              <a:rPr lang="es-CO" sz="3200">
+              <a:rPr lang="es-CO" sz="3200" dirty="0">
                 <a:latin typeface="Helvetica Light"/>
               </a:rPr>
               <a:t>/App Service</a:t>
             </a:r>
-            <a:endParaRPr lang="es-CO" sz="3200" u="sng" noProof="0">
+            <a:endParaRPr lang="es-CO" sz="3200" u="sng" noProof="0" dirty="0">
               <a:latin typeface="Helvetica Light"/>
             </a:endParaRPr>
           </a:p>
@@ -7028,14 +7028,14 @@
                         <a:buNone/>
                       </a:pPr>
                       <a:r>
-                        <a:rPr lang="es-CO" sz="2800" b="1"/>
+                        <a:rPr lang="es-CO" sz="2800" b="1" dirty="0"/>
                         <a:t>Usar </a:t>
                       </a:r>
                       <a:r>
-                        <a:rPr lang="es-CO" sz="2800" b="1" err="1"/>
+                        <a:rPr lang="es-CO" sz="2800" b="1" dirty="0" err="1"/>
                         <a:t>Functions</a:t>
                       </a:r>
-                      <a:endParaRPr lang="es-CO" sz="2800" b="1"/>
+                      <a:endParaRPr lang="es-CO" sz="2800" b="1" dirty="0"/>
                     </a:p>
                   </a:txBody>
                   <a:tcPr anchor="ctr"/>
@@ -7049,7 +7049,7 @@
                         <a:buNone/>
                       </a:pPr>
                       <a:r>
-                        <a:rPr lang="es-CO" sz="2800" b="1"/>
+                        <a:rPr lang="es-CO" sz="2800" b="1" dirty="0"/>
                         <a:t>Usar Express + VM/App Service</a:t>
                       </a:r>
                     </a:p>
@@ -7244,7 +7244,7 @@
                         <a:buNone/>
                       </a:pPr>
                       <a:r>
-                        <a:rPr lang="es-CO" sz="2800"/>
+                        <a:rPr lang="es-CO" sz="2800" dirty="0"/>
                         <a:t>Presupuesto fijo mensual</a:t>
                       </a:r>
                     </a:p>
@@ -7311,7 +7311,7 @@
               <a:buNone/>
             </a:pPr>
             <a:r>
-              <a:rPr lang="es-CO" sz="2800" b="1"/>
+              <a:rPr lang="es-CO" sz="2800" b="1" dirty="0"/>
               <a:t>Cuándo tiene sentido vs cuándo no</a:t>
             </a:r>
           </a:p>
@@ -7379,7 +7379,7 @@
           </a:ln>
           <a:extLst>
             <a:ext uri="{C572A759-6A51-4108-AA02-DFA0A04FC94B}">
-              <ma14:wrappingTextBoxFlag xmlns:m="http://schemas.openxmlformats.org/officeDocument/2006/math" xmlns:a14="http://schemas.microsoft.com/office/drawing/2010/main" xmlns:ma14="http://schemas.microsoft.com/office/mac/drawingml/2011/main" xmlns="" val="1"/>
+              <ma14:wrappingTextBoxFlag xmlns="" xmlns:m="http://schemas.openxmlformats.org/officeDocument/2006/math" xmlns:a14="http://schemas.microsoft.com/office/drawing/2010/main" xmlns:ma14="http://schemas.microsoft.com/office/mac/drawingml/2011/main" val="1"/>
             </a:ext>
           </a:extLst>
         </p:spPr>
@@ -7398,13 +7398,13 @@
           </a:lstStyle>
           <a:p>
             <a:r>
-              <a:rPr lang="es-CO" sz="3200" noProof="0">
+              <a:rPr lang="es-CO" sz="3200" noProof="0" dirty="0">
                 <a:latin typeface="Helvetica Light"/>
               </a:rPr>
               <a:t>Sobre </a:t>
             </a:r>
             <a:r>
-              <a:rPr lang="es-CO" sz="3200" u="sng" noProof="0">
+              <a:rPr lang="es-CO" sz="3200" u="sng" noProof="0" dirty="0">
                 <a:latin typeface="Helvetica Light"/>
               </a:rPr>
               <a:t>Serverless</a:t>
@@ -7449,24 +7449,24 @@
           <a:p>
             <a:pPr algn="just"/>
             <a:r>
-              <a:rPr lang="es-CO" sz="2800"/>
+              <a:rPr lang="es-CO" sz="2800" dirty="0"/>
               <a:t>Serverless o computación sin servidor describe un modelo de ejecución en la nube donde el proveedor gestiona de forma automática la infraestructura subyacente. Aunque existen servidores físicos, el programador no los administra ni configura, pagando únicamente por los recursos consumidos durante la ejecución exacta del código.</a:t>
             </a:r>
           </a:p>
           <a:p>
             <a:pPr algn="just"/>
-            <a:endParaRPr lang="es-CO" sz="2800"/>
+            <a:endParaRPr lang="es-CO" sz="2800" dirty="0"/>
           </a:p>
           <a:p>
             <a:pPr algn="just"/>
             <a:r>
-              <a:rPr lang="es-CO" sz="2800" b="1"/>
+              <a:rPr lang="es-CO" sz="2800" b="1" dirty="0"/>
               <a:t>Características principales:</a:t>
             </a:r>
           </a:p>
           <a:p>
             <a:pPr algn="just"/>
-            <a:endParaRPr lang="es-CO" sz="2800"/>
+            <a:endParaRPr lang="es-CO" sz="2800" dirty="0"/>
           </a:p>
           <a:p>
             <a:pPr marL="457200" lvl="0" indent="-457200" algn="just">
@@ -7474,7 +7474,7 @@
               <a:buChar char="•"/>
             </a:pPr>
             <a:r>
-              <a:rPr lang="es-CO" sz="2800"/>
+              <a:rPr lang="es-CO" sz="2800" dirty="0"/>
               <a:t>Cero gestión: El mantenimiento, la seguridad y los parches del sistema operativo quedan a cargo del proveedor.</a:t>
             </a:r>
           </a:p>
@@ -7484,11 +7484,11 @@
               <a:buChar char="•"/>
             </a:pPr>
             <a:r>
-              <a:rPr lang="es-CO" sz="2800" err="1"/>
+              <a:rPr lang="es-CO" sz="2800" dirty="0" err="1"/>
               <a:t>Autoescalado</a:t>
             </a:r>
             <a:r>
-              <a:rPr lang="es-CO" sz="2800"/>
+              <a:rPr lang="es-CO" sz="2800" dirty="0"/>
               <a:t>: Los recursos aumentan o disminuyen de manera dinámica según la demanda de las peticiones.</a:t>
             </a:r>
           </a:p>
@@ -7498,7 +7498,7 @@
               <a:buChar char="•"/>
             </a:pPr>
             <a:r>
-              <a:rPr lang="es-CO" sz="2800" b="1"/>
+              <a:rPr lang="es-CO" sz="2800" b="1" dirty="0"/>
               <a:t>Pago por uso: No hay costes por servidores inactivos; solo se factura el tiempo exacto de procesamiento del código.</a:t>
             </a:r>
           </a:p>
@@ -7508,14 +7508,14 @@
               <a:buChar char="•"/>
             </a:pPr>
             <a:r>
-              <a:rPr lang="es-CO" sz="2800"/>
+              <a:rPr lang="es-CO" sz="2800" dirty="0"/>
               <a:t>Funciones eficientes: El código se divide en pequeñas tareas o funciones que responden a eventos específicos (como solicitudes HTTP).</a:t>
             </a:r>
           </a:p>
           <a:p>
             <a:pPr algn="just"/>
             <a:r>
-              <a:rPr lang="es-CO" sz="2800"/>
+              <a:rPr lang="es-CO" sz="2800" dirty="0"/>
               <a:t>  </a:t>
             </a:r>
           </a:p>
@@ -7602,13 +7602,13 @@
           </a:lstStyle>
           <a:p>
             <a:r>
-              <a:rPr lang="es-CO" sz="3200" noProof="0">
+              <a:rPr lang="es-CO" sz="3200" noProof="0" dirty="0">
                 <a:latin typeface="Helvetica Light"/>
               </a:rPr>
               <a:t>Sobre </a:t>
             </a:r>
             <a:r>
-              <a:rPr lang="es-CO" sz="3200" u="sng" noProof="0">
+              <a:rPr lang="es-CO" sz="3200" u="sng" noProof="0" dirty="0">
                 <a:latin typeface="Helvetica Light"/>
               </a:rPr>
               <a:t>Serverless</a:t>
@@ -7641,7 +7641,7 @@
           </a:ln>
           <a:extLst>
             <a:ext uri="{C572A759-6A51-4108-AA02-DFA0A04FC94B}">
-              <ma14:wrappingTextBoxFlag xmlns:m="http://schemas.openxmlformats.org/officeDocument/2006/math" xmlns:a14="http://schemas.microsoft.com/office/drawing/2010/main" xmlns:ma14="http://schemas.microsoft.com/office/mac/drawingml/2011/main" xmlns="" val="1"/>
+              <ma14:wrappingTextBoxFlag xmlns="" xmlns:m="http://schemas.openxmlformats.org/officeDocument/2006/math" xmlns:a14="http://schemas.microsoft.com/office/drawing/2010/main" xmlns:ma14="http://schemas.microsoft.com/office/mac/drawingml/2011/main" val="1"/>
             </a:ext>
           </a:extLst>
         </p:spPr>
@@ -7652,13 +7652,13 @@
           <a:lstStyle/>
           <a:p>
             <a:r>
-              <a:rPr lang="es-CO" sz="3600"/>
+              <a:rPr lang="es-CO" sz="3600" dirty="0"/>
               <a:t>Serverless no significa que no haya servidores. Los hay, pero son completamente invisibles. No los aprovisionamos, no los configuramos, no los escalamos y no los pagamos cuando no se usan.</a:t>
             </a:r>
           </a:p>
           <a:p>
             <a:r>
-              <a:rPr lang="es-CO" sz="3600"/>
+              <a:rPr lang="es-CO" sz="3600" dirty="0"/>
               <a:t>  </a:t>
             </a:r>
           </a:p>
@@ -7745,13 +7745,13 @@
           </a:lstStyle>
           <a:p>
             <a:r>
-              <a:rPr lang="es-CO" sz="3200" noProof="0">
+              <a:rPr lang="es-CO" sz="3200" noProof="0" dirty="0">
                 <a:latin typeface="Helvetica Light"/>
               </a:rPr>
               <a:t>Sobre </a:t>
             </a:r>
             <a:r>
-              <a:rPr lang="es-CO" sz="3200" u="sng" noProof="0">
+              <a:rPr lang="es-CO" sz="3200" u="sng" noProof="0" dirty="0">
                 <a:latin typeface="Helvetica Light"/>
               </a:rPr>
               <a:t>Serverless</a:t>
@@ -7784,7 +7784,7 @@
           </a:ln>
           <a:extLst>
             <a:ext uri="{C572A759-6A51-4108-AA02-DFA0A04FC94B}">
-              <ma14:wrappingTextBoxFlag xmlns:m="http://schemas.openxmlformats.org/officeDocument/2006/math" xmlns:a14="http://schemas.microsoft.com/office/drawing/2010/main" xmlns:ma14="http://schemas.microsoft.com/office/mac/drawingml/2011/main" xmlns="" val="1"/>
+              <ma14:wrappingTextBoxFlag xmlns="" xmlns:m="http://schemas.openxmlformats.org/officeDocument/2006/math" xmlns:a14="http://schemas.microsoft.com/office/drawing/2010/main" xmlns:ma14="http://schemas.microsoft.com/office/mac/drawingml/2011/main" val="1"/>
             </a:ext>
           </a:extLst>
         </p:spPr>
@@ -7795,59 +7795,59 @@
           <a:lstStyle/>
           <a:p>
             <a:r>
-              <a:rPr lang="es-CO" sz="2800" b="1"/>
+              <a:rPr lang="es-CO" sz="2800" b="1" dirty="0"/>
               <a:t>Proveedores y servicios comunes:</a:t>
             </a:r>
           </a:p>
           <a:p>
-            <a:endParaRPr lang="es-CO" sz="2800" b="1"/>
+            <a:endParaRPr lang="es-CO" sz="2800" b="1" dirty="0"/>
           </a:p>
           <a:p>
             <a:pPr lvl="0"/>
             <a:r>
-              <a:rPr lang="es-CO" sz="2800" b="1"/>
+              <a:rPr lang="es-CO" sz="2800" b="1" dirty="0"/>
               <a:t>Amazon Web Services (AWS):</a:t>
             </a:r>
             <a:r>
-              <a:rPr lang="es-CO" sz="2800"/>
+              <a:rPr lang="es-CO" sz="2800" dirty="0"/>
               <a:t> AWS Lambda para ejecución de código y Amazon API Gateway.</a:t>
             </a:r>
           </a:p>
           <a:p>
             <a:pPr lvl="0"/>
             <a:r>
-              <a:rPr lang="es-CO" sz="2800" b="1"/>
+              <a:rPr lang="es-CO" sz="2800" b="1" dirty="0"/>
               <a:t>Google Cloud:</a:t>
             </a:r>
             <a:r>
-              <a:rPr lang="es-CO" sz="2800"/>
+              <a:rPr lang="es-CO" sz="2800" dirty="0"/>
               <a:t> Cloud </a:t>
             </a:r>
             <a:r>
-              <a:rPr lang="es-CO" sz="2800" err="1"/>
+              <a:rPr lang="es-CO" sz="2800" dirty="0" err="1"/>
               <a:t>Functions</a:t>
             </a:r>
             <a:r>
-              <a:rPr lang="es-CO" sz="2800"/>
+              <a:rPr lang="es-CO" sz="2800" dirty="0"/>
               <a:t> y Cloud Run.</a:t>
             </a:r>
           </a:p>
           <a:p>
             <a:pPr lvl="0"/>
             <a:r>
-              <a:rPr lang="es-CO" sz="2800" b="1"/>
+              <a:rPr lang="es-CO" sz="2800" b="1" dirty="0"/>
               <a:t>Microsoft Azure:</a:t>
             </a:r>
             <a:r>
-              <a:rPr lang="es-CO" sz="2800"/>
+              <a:rPr lang="es-CO" sz="2800" dirty="0"/>
               <a:t> Azure </a:t>
             </a:r>
             <a:r>
-              <a:rPr lang="es-CO" sz="2800" err="1"/>
+              <a:rPr lang="es-CO" sz="2800" dirty="0" err="1"/>
               <a:t>Functions</a:t>
             </a:r>
             <a:r>
-              <a:rPr lang="es-CO" sz="2800"/>
+              <a:rPr lang="es-CO" sz="2800" dirty="0"/>
               <a:t>.</a:t>
             </a:r>
           </a:p>
@@ -7915,7 +7915,7 @@
           </a:ln>
           <a:extLst>
             <a:ext uri="{C572A759-6A51-4108-AA02-DFA0A04FC94B}">
-              <ma14:wrappingTextBoxFlag xmlns:m="http://schemas.openxmlformats.org/officeDocument/2006/math" xmlns:a14="http://schemas.microsoft.com/office/drawing/2010/main" xmlns:ma14="http://schemas.microsoft.com/office/mac/drawingml/2011/main" xmlns="" val="1"/>
+              <ma14:wrappingTextBoxFlag xmlns="" xmlns:m="http://schemas.openxmlformats.org/officeDocument/2006/math" xmlns:a14="http://schemas.microsoft.com/office/drawing/2010/main" xmlns:ma14="http://schemas.microsoft.com/office/mac/drawingml/2011/main" val="1"/>
             </a:ext>
           </a:extLst>
         </p:spPr>
@@ -7934,13 +7934,13 @@
           </a:lstStyle>
           <a:p>
             <a:r>
-              <a:rPr lang="es-CO" sz="3200" noProof="0">
+              <a:rPr lang="es-CO" sz="3200" noProof="0" dirty="0">
                 <a:latin typeface="Helvetica Light"/>
               </a:rPr>
               <a:t>Sobre </a:t>
             </a:r>
             <a:r>
-              <a:rPr lang="es-CO" sz="3200" u="sng" noProof="0">
+              <a:rPr lang="es-CO" sz="3200" u="sng" noProof="0" dirty="0">
                 <a:latin typeface="Helvetica Light"/>
               </a:rPr>
               <a:t>Serverless</a:t>
@@ -7973,7 +7973,7 @@
           </a:ln>
           <a:extLst>
             <a:ext uri="{C572A759-6A51-4108-AA02-DFA0A04FC94B}">
-              <ma14:wrappingTextBoxFlag xmlns:m="http://schemas.openxmlformats.org/officeDocument/2006/math" xmlns:a14="http://schemas.microsoft.com/office/drawing/2010/main" xmlns:ma14="http://schemas.microsoft.com/office/mac/drawingml/2011/main" xmlns="" val="1"/>
+              <ma14:wrappingTextBoxFlag xmlns="" xmlns:m="http://schemas.openxmlformats.org/officeDocument/2006/math" xmlns:a14="http://schemas.microsoft.com/office/drawing/2010/main" xmlns:ma14="http://schemas.microsoft.com/office/mac/drawingml/2011/main" val="1"/>
             </a:ext>
           </a:extLst>
         </p:spPr>
@@ -7985,24 +7985,24 @@
           <a:p>
             <a:pPr algn="just"/>
             <a:r>
-              <a:rPr lang="es-CO" sz="2800"/>
+              <a:rPr lang="es-CO" sz="2800" dirty="0"/>
               <a:t>Con la computación sin servidor, los desarrolladores pueden ejecutar código, administrar datos e integrar aplicaciones sin preocuparse por las tareas de administración de la infraestructura (servidores locales, máquinas virtuales).</a:t>
             </a:r>
           </a:p>
           <a:p>
             <a:pPr algn="just"/>
-            <a:endParaRPr lang="es-CO" sz="2800"/>
+            <a:endParaRPr lang="es-CO" sz="2800" dirty="0"/>
           </a:p>
           <a:p>
             <a:pPr algn="just"/>
             <a:r>
-              <a:rPr lang="es-CO" sz="2800"/>
+              <a:rPr lang="es-CO" sz="2800" dirty="0"/>
               <a:t>Solo paga por la CPU, la memoria y otros recursos informáticos necesarios cuando se ejecuta el código. No paga nada por los recursos inactivos. Este modelo de facturación de pago por valor garantiza una utilización óptima de los recursos y no se desperdicia debido al exceso de aprovisionamiento.</a:t>
             </a:r>
           </a:p>
           <a:p>
             <a:pPr algn="just"/>
-            <a:endParaRPr lang="es-CO" sz="4000"/>
+            <a:endParaRPr lang="es-CO" sz="4000" dirty="0"/>
           </a:p>
         </p:txBody>
       </p:sp>
@@ -8087,7 +8087,7 @@
           </a:lstStyle>
           <a:p>
             <a:r>
-              <a:rPr lang="es-CO" b="0"/>
+              <a:rPr lang="es-CO" b="0" dirty="0"/>
               <a:t>¿Cómo funciona la arquitectura sin servidor?</a:t>
             </a:r>
           </a:p>
@@ -8118,7 +8118,7 @@
           </a:ln>
           <a:extLst>
             <a:ext uri="{C572A759-6A51-4108-AA02-DFA0A04FC94B}">
-              <ma14:wrappingTextBoxFlag xmlns:m="http://schemas.openxmlformats.org/officeDocument/2006/math" xmlns:a14="http://schemas.microsoft.com/office/drawing/2010/main" xmlns:ma14="http://schemas.microsoft.com/office/mac/drawingml/2011/main" xmlns="" val="1"/>
+              <ma14:wrappingTextBoxFlag xmlns="" xmlns:m="http://schemas.openxmlformats.org/officeDocument/2006/math" xmlns:a14="http://schemas.microsoft.com/office/drawing/2010/main" xmlns:ma14="http://schemas.microsoft.com/office/mac/drawingml/2011/main" val="1"/>
             </a:ext>
           </a:extLst>
         </p:spPr>
@@ -8130,70 +8130,70 @@
           <a:p>
             <a:pPr algn="just"/>
             <a:r>
-              <a:rPr lang="es-CO" sz="2800"/>
+              <a:rPr lang="es-CO" sz="2800" dirty="0"/>
               <a:t>Cualquier aplicación tiene dos áreas amplias de funcionalidad: </a:t>
             </a:r>
             <a:r>
-              <a:rPr lang="es-CO" sz="2800" b="1"/>
+              <a:rPr lang="es-CO" sz="2800" b="1" dirty="0"/>
               <a:t>el </a:t>
             </a:r>
             <a:r>
-              <a:rPr lang="es-CO" sz="2800" b="1" err="1"/>
+              <a:rPr lang="es-CO" sz="2800" b="1" dirty="0" err="1"/>
               <a:t>frontend</a:t>
             </a:r>
             <a:r>
-              <a:rPr lang="es-CO" sz="2800" b="1"/>
+              <a:rPr lang="es-CO" sz="2800" b="1" dirty="0"/>
               <a:t> y el </a:t>
             </a:r>
             <a:r>
-              <a:rPr lang="es-CO" sz="2800" b="1" err="1"/>
+              <a:rPr lang="es-CO" sz="2800" b="1" dirty="0" err="1"/>
               <a:t>backend</a:t>
             </a:r>
             <a:r>
-              <a:rPr lang="es-CO" sz="2800"/>
+              <a:rPr lang="es-CO" sz="2800" dirty="0"/>
               <a:t>. El </a:t>
             </a:r>
             <a:r>
-              <a:rPr lang="es-CO" sz="2800" err="1"/>
+              <a:rPr lang="es-CO" sz="2800" dirty="0" err="1"/>
               <a:t>frontend</a:t>
             </a:r>
             <a:r>
-              <a:rPr lang="es-CO" sz="2800"/>
+              <a:rPr lang="es-CO" sz="2800" dirty="0"/>
               <a:t> incluye todo aquello con lo que interactúan los usuarios finales, como el diseño visual, los botones y el texto de la pantalla. El </a:t>
             </a:r>
             <a:r>
-              <a:rPr lang="es-CO" sz="2800" err="1"/>
+              <a:rPr lang="es-CO" sz="2800" dirty="0" err="1"/>
               <a:t>backend</a:t>
             </a:r>
             <a:r>
-              <a:rPr lang="es-CO" sz="2800"/>
+              <a:rPr lang="es-CO" sz="2800" dirty="0"/>
               <a:t> incluye funciones a las que los usuarios no pueden acceder, como el almacenamiento y el procesamiento de datos.</a:t>
             </a:r>
           </a:p>
           <a:p>
             <a:pPr algn="just"/>
-            <a:endParaRPr lang="es-CO" sz="2800"/>
+            <a:endParaRPr lang="es-CO" sz="2800" dirty="0"/>
           </a:p>
           <a:p>
             <a:pPr algn="just"/>
             <a:r>
-              <a:rPr lang="es-CO" sz="2800"/>
+              <a:rPr lang="es-CO" sz="2800" dirty="0"/>
               <a:t>Por ejemplo, piense en una aplicación de reserva de vuelos en su dispositivo móvil. El </a:t>
             </a:r>
             <a:r>
-              <a:rPr lang="es-CO" sz="2800" err="1"/>
+              <a:rPr lang="es-CO" sz="2800" dirty="0" err="1"/>
               <a:t>frontend</a:t>
             </a:r>
             <a:r>
-              <a:rPr lang="es-CO" sz="2800"/>
+              <a:rPr lang="es-CO" sz="2800" dirty="0"/>
               <a:t> es la interfaz de usuario de la aplicación, donde puede elegir fechas y solicitar una lista de vuelos disponibles. Su solicitud va al </a:t>
             </a:r>
             <a:r>
-              <a:rPr lang="es-CO" sz="2800" err="1"/>
+              <a:rPr lang="es-CO" sz="2800" dirty="0" err="1"/>
               <a:t>backend</a:t>
             </a:r>
             <a:r>
-              <a:rPr lang="es-CO" sz="2800"/>
+              <a:rPr lang="es-CO" sz="2800" dirty="0"/>
               <a:t>, que busca en la base de datos y devuelve información sobre todos los vuelos disponibles en el periodo elegido. El siguiente diagrama ilustra la arquitectura tradicional.</a:t>
             </a:r>
           </a:p>
@@ -8328,7 +8328,7 @@
           </a:ln>
           <a:extLst>
             <a:ext uri="{C572A759-6A51-4108-AA02-DFA0A04FC94B}">
-              <ma14:wrappingTextBoxFlag xmlns:m="http://schemas.openxmlformats.org/officeDocument/2006/math" xmlns:a14="http://schemas.microsoft.com/office/drawing/2010/main" xmlns:ma14="http://schemas.microsoft.com/office/mac/drawingml/2011/main" xmlns="" val="1"/>
+              <ma14:wrappingTextBoxFlag xmlns="" xmlns:m="http://schemas.openxmlformats.org/officeDocument/2006/math" xmlns:a14="http://schemas.microsoft.com/office/drawing/2010/main" xmlns:ma14="http://schemas.microsoft.com/office/mac/drawingml/2011/main" val="1"/>
             </a:ext>
           </a:extLst>
         </p:spPr>
@@ -8347,7 +8347,7 @@
           </a:lstStyle>
           <a:p>
             <a:r>
-              <a:rPr lang="es-CO" b="0"/>
+              <a:rPr lang="es-CO" b="0" dirty="0"/>
               <a:t>¿Cómo funciona la arquitectura sin servidor?</a:t>
             </a:r>
           </a:p>
@@ -8390,50 +8390,50 @@
           <a:p>
             <a:pPr algn="just"/>
             <a:r>
-              <a:rPr lang="es-CO" sz="2800"/>
+              <a:rPr lang="es-CO" sz="2800" dirty="0"/>
               <a:t>En la </a:t>
             </a:r>
             <a:r>
-              <a:rPr lang="es-CO" sz="2800" b="1"/>
+              <a:rPr lang="es-CO" sz="2800" b="1" dirty="0"/>
               <a:t>arquitectura sin servidor</a:t>
             </a:r>
             <a:r>
-              <a:rPr lang="es-CO" sz="2800"/>
+              <a:rPr lang="es-CO" sz="2800" dirty="0"/>
               <a:t>, los desarrolladores implementan el código de </a:t>
             </a:r>
             <a:r>
-              <a:rPr lang="es-CO" sz="2800" err="1"/>
+              <a:rPr lang="es-CO" sz="2800" dirty="0" err="1"/>
               <a:t>backend</a:t>
             </a:r>
             <a:r>
-              <a:rPr lang="es-CO" sz="2800"/>
+              <a:rPr lang="es-CO" sz="2800" dirty="0"/>
               <a:t> en la infraestructura de nube proporcionada por los proveedores de servicios en la nube. La clave de las aplicaciones sin servidor es la </a:t>
             </a:r>
             <a:r>
-              <a:rPr lang="es-CO" sz="2800" b="1"/>
+              <a:rPr lang="es-CO" sz="2800" b="1" dirty="0"/>
               <a:t>arquitectura basada en eventos</a:t>
             </a:r>
             <a:r>
-              <a:rPr lang="es-CO" sz="2800"/>
+              <a:rPr lang="es-CO" sz="2800" dirty="0"/>
               <a:t>, que es un patrón de arquitectura moderna diseñado a partir de servicios pequeños y desacoplados que publican, consumen o enrutan eventos. Los </a:t>
             </a:r>
             <a:r>
-              <a:rPr lang="es-CO" sz="2800" b="1"/>
+              <a:rPr lang="es-CO" sz="2800" b="1" dirty="0"/>
               <a:t>eventos</a:t>
             </a:r>
             <a:r>
-              <a:rPr lang="es-CO" sz="2800"/>
+              <a:rPr lang="es-CO" sz="2800" dirty="0"/>
               <a:t> son mensajes que se envían entre servicios.</a:t>
             </a:r>
           </a:p>
           <a:p>
             <a:pPr algn="just"/>
-            <a:endParaRPr lang="es-CO" sz="2800"/>
+            <a:endParaRPr lang="es-CO" sz="2800" dirty="0"/>
           </a:p>
           <a:p>
             <a:pPr algn="just"/>
             <a:r>
-              <a:rPr lang="es-CO" sz="2800"/>
+              <a:rPr lang="es-CO" sz="2800" dirty="0"/>
               <a:t>Esta arquitectura hace que sea más fácil escalar, actualizar e implementar de manera independiente componentes individuales de un sistema. El siguiente diagrama ilustra un microservicio sin servidor basado en eventos.</a:t>
             </a:r>
           </a:p>
@@ -10667,6 +10667,12 @@
 </file>
 
 <file path=customXml/item1.xml><?xml version="1.0" encoding="utf-8"?>
+<p:properties xmlns:p="http://schemas.microsoft.com/office/2006/metadata/properties" xmlns:xsi="http://www.w3.org/2001/XMLSchema-instance" xmlns:pc="http://schemas.microsoft.com/office/infopath/2007/PartnerControls">
+  <documentManagement/>
+</p:properties>
+</file>
+
+<file path=customXml/item2.xml><?xml version="1.0" encoding="utf-8"?>
 <?mso-contentType ?>
 <FormTemplates xmlns="http://schemas.microsoft.com/sharepoint/v3/contenttype/forms">
   <Display>DocumentLibraryForm</Display>
@@ -10675,7 +10681,7 @@
 </FormTemplates>
 </file>
 
-<file path=customXml/item2.xml><?xml version="1.0" encoding="utf-8"?>
+<file path=customXml/item3.xml><?xml version="1.0" encoding="utf-8"?>
 <ct:contentTypeSchema xmlns:ct="http://schemas.microsoft.com/office/2006/metadata/contentType" xmlns:ma="http://schemas.microsoft.com/office/2006/metadata/properties/metaAttributes" ct:_="" ma:_="" ma:contentTypeName="Documento" ma:contentTypeID="0x010100B359A176E8B9854AA3D01AE34ED232F3" ma:contentTypeVersion="10" ma:contentTypeDescription="Crear nuevo documento." ma:contentTypeScope="" ma:versionID="3925640f1aa2cf9dfb10aadb476aad26">
   <xsd:schema xmlns:xsd="http://www.w3.org/2001/XMLSchema" xmlns:xs="http://www.w3.org/2001/XMLSchema" xmlns:p="http://schemas.microsoft.com/office/2006/metadata/properties" xmlns:ns2="aceb4fe1-53dd-4732-b090-f293850c2989" xmlns:ns3="de26d076-c54c-4210-9ee1-315c82760e76" targetNamespace="http://schemas.microsoft.com/office/2006/metadata/properties" ma:root="true" ma:fieldsID="e580be744deaf20ec630cabec991a74b" ns2:_="" ns3:_="">
     <xsd:import namespace="aceb4fe1-53dd-4732-b090-f293850c2989"/>
@@ -10878,13 +10884,24 @@
 </ct:contentTypeSchema>
 </file>
 
-<file path=customXml/item3.xml><?xml version="1.0" encoding="utf-8"?>
-<p:properties xmlns:p="http://schemas.microsoft.com/office/2006/metadata/properties" xmlns:xsi="http://www.w3.org/2001/XMLSchema-instance" xmlns:pc="http://schemas.microsoft.com/office/infopath/2007/PartnerControls">
-  <documentManagement/>
-</p:properties>
+<file path=customXml/itemProps1.xml><?xml version="1.0" encoding="utf-8"?>
+<ds:datastoreItem xmlns:ds="http://schemas.openxmlformats.org/officeDocument/2006/customXml" ds:itemID="{ED944201-0AFB-4FDA-86CF-670F1F8AF59D}">
+  <ds:schemaRefs>
+    <ds:schemaRef ds:uri="aceb4fe1-53dd-4732-b090-f293850c2989"/>
+    <ds:schemaRef ds:uri="http://schemas.microsoft.com/office/2006/documentManagement/types"/>
+    <ds:schemaRef ds:uri="http://schemas.microsoft.com/office/infopath/2007/PartnerControls"/>
+    <ds:schemaRef ds:uri="http://purl.org/dc/elements/1.1/"/>
+    <ds:schemaRef ds:uri="http://purl.org/dc/terms/"/>
+    <ds:schemaRef ds:uri="http://purl.org/dc/dcmitype/"/>
+    <ds:schemaRef ds:uri="http://schemas.openxmlformats.org/package/2006/metadata/core-properties"/>
+    <ds:schemaRef ds:uri="de26d076-c54c-4210-9ee1-315c82760e76"/>
+    <ds:schemaRef ds:uri="http://schemas.microsoft.com/office/2006/metadata/properties"/>
+    <ds:schemaRef ds:uri="http://www.w3.org/XML/1998/namespace"/>
+  </ds:schemaRefs>
+</ds:datastoreItem>
 </file>
 
-<file path=customXml/itemProps1.xml><?xml version="1.0" encoding="utf-8"?>
+<file path=customXml/itemProps2.xml><?xml version="1.0" encoding="utf-8"?>
 <ds:datastoreItem xmlns:ds="http://schemas.openxmlformats.org/officeDocument/2006/customXml" ds:itemID="{B4372E40-7AC3-447C-AF4A-54FCAFB5E192}">
   <ds:schemaRefs>
     <ds:schemaRef ds:uri="http://schemas.microsoft.com/sharepoint/v3/contenttype/forms"/>
@@ -10892,38 +10909,21 @@
 </ds:datastoreItem>
 </file>
 
-<file path=customXml/itemProps2.xml><?xml version="1.0" encoding="utf-8"?>
+<file path=customXml/itemProps3.xml><?xml version="1.0" encoding="utf-8"?>
 <ds:datastoreItem xmlns:ds="http://schemas.openxmlformats.org/officeDocument/2006/customXml" ds:itemID="{9F8E361F-7359-4C4E-8951-5BED68039CE1}">
   <ds:schemaRefs>
+    <ds:schemaRef ds:uri="http://schemas.microsoft.com/office/2006/metadata/contentType"/>
+    <ds:schemaRef ds:uri="http://schemas.microsoft.com/office/2006/metadata/properties/metaAttributes"/>
+    <ds:schemaRef ds:uri="http://www.w3.org/2001/XMLSchema"/>
+    <ds:schemaRef ds:uri="http://schemas.microsoft.com/office/2006/metadata/properties"/>
     <ds:schemaRef ds:uri="aceb4fe1-53dd-4732-b090-f293850c2989"/>
     <ds:schemaRef ds:uri="de26d076-c54c-4210-9ee1-315c82760e76"/>
+    <ds:schemaRef ds:uri="http://schemas.microsoft.com/office/2006/documentManagement/types"/>
+    <ds:schemaRef ds:uri="http://schemas.microsoft.com/office/infopath/2007/PartnerControls"/>
+    <ds:schemaRef ds:uri="http://schemas.openxmlformats.org/package/2006/metadata/core-properties"/>
     <ds:schemaRef ds:uri="http://purl.org/dc/elements/1.1/"/>
     <ds:schemaRef ds:uri="http://purl.org/dc/terms/"/>
     <ds:schemaRef ds:uri="http://schemas.microsoft.com/internal/obd"/>
-    <ds:schemaRef ds:uri="http://schemas.microsoft.com/office/2006/documentManagement/types"/>
-    <ds:schemaRef ds:uri="http://schemas.microsoft.com/office/2006/metadata/contentType"/>
-    <ds:schemaRef ds:uri="http://schemas.microsoft.com/office/2006/metadata/properties"/>
-    <ds:schemaRef ds:uri="http://schemas.microsoft.com/office/2006/metadata/properties/metaAttributes"/>
-    <ds:schemaRef ds:uri="http://schemas.microsoft.com/office/infopath/2007/PartnerControls"/>
-    <ds:schemaRef ds:uri="http://schemas.openxmlformats.org/package/2006/metadata/core-properties"/>
-    <ds:schemaRef ds:uri="http://www.w3.org/2001/XMLSchema"/>
-  </ds:schemaRefs>
-</ds:datastoreItem>
-</file>
-
-<file path=customXml/itemProps3.xml><?xml version="1.0" encoding="utf-8"?>
-<ds:datastoreItem xmlns:ds="http://schemas.openxmlformats.org/officeDocument/2006/customXml" ds:itemID="{ED944201-0AFB-4FDA-86CF-670F1F8AF59D}">
-  <ds:schemaRefs>
-    <ds:schemaRef ds:uri="aceb4fe1-53dd-4732-b090-f293850c2989"/>
-    <ds:schemaRef ds:uri="de26d076-c54c-4210-9ee1-315c82760e76"/>
-    <ds:schemaRef ds:uri="http://purl.org/dc/dcmitype/"/>
-    <ds:schemaRef ds:uri="http://purl.org/dc/elements/1.1/"/>
-    <ds:schemaRef ds:uri="http://purl.org/dc/terms/"/>
-    <ds:schemaRef ds:uri="http://schemas.microsoft.com/office/2006/documentManagement/types"/>
-    <ds:schemaRef ds:uri="http://schemas.microsoft.com/office/2006/metadata/properties"/>
-    <ds:schemaRef ds:uri="http://schemas.microsoft.com/office/infopath/2007/PartnerControls"/>
-    <ds:schemaRef ds:uri="http://schemas.openxmlformats.org/package/2006/metadata/core-properties"/>
-    <ds:schemaRef ds:uri="http://www.w3.org/XML/1998/namespace"/>
   </ds:schemaRefs>
 </ds:datastoreItem>
 </file>